--- a/assets/pptx/catalog-392.pptx
+++ b/assets/pptx/catalog-392.pptx
@@ -3562,7 +3562,7 @@
                 <a:ea typeface="Ebrima"/>
                 <a:cs typeface="Ebrima"/>
               </a:rPr>
-              <a:t>የደስታዬ ድምጽ ጩኸቴ (2x)</a:t>
+              <a:t>የደስታዬ ድምጽ ጩኸቴ 2x</a:t>
             </a:r>
           </a:p>
         </p:txBody>
@@ -3750,7 +3750,7 @@
                 <a:ea typeface="Ebrima"/>
                 <a:cs typeface="Ebrima"/>
               </a:rPr>
-              <a:t>ተመሥገን ተመሥገን (8x)</a:t>
+              <a:t>ተመሥገን ተመሥገን 8x</a:t>
             </a:r>
           </a:p>
         </p:txBody>
@@ -3871,7 +3871,7 @@
                 <a:ea typeface="Ebrima"/>
                 <a:cs typeface="Ebrima"/>
               </a:rPr>
-              <a:t>ጠገብኩ በደስታ ሳቅ ሲሳይ (2x)</a:t>
+              <a:t>ጠገብኩ በደስታ ሳቅ ሲሳይ 2x</a:t>
             </a:r>
           </a:p>
         </p:txBody>
@@ -4059,7 +4059,7 @@
                 <a:ea typeface="Ebrima"/>
                 <a:cs typeface="Ebrima"/>
               </a:rPr>
-              <a:t>ተመሥገን ተመሥገን (8x)</a:t>
+              <a:t>ተመሥገን ተመሥገን 8x</a:t>
             </a:r>
           </a:p>
           <a:p>
@@ -4077,7 +4077,7 @@
                 <a:ea typeface="Ebrima"/>
                 <a:cs typeface="Ebrima"/>
               </a:rPr>
-              <a:t>ይገባሃል ተመሥገን (4x)</a:t>
+              <a:t>ይገባሃል ተመሥገን 4x</a:t>
             </a:r>
           </a:p>
           <a:p>
@@ -4095,7 +4095,7 @@
                 <a:ea typeface="Ebrima"/>
                 <a:cs typeface="Ebrima"/>
               </a:rPr>
-              <a:t>ተመሥገን (4x)</a:t>
+              <a:t>ተመሥገን 4x</a:t>
             </a:r>
           </a:p>
         </p:txBody>
